--- a/Science_Complete_Course_SagarSir/02_Chemistry_रसायन_विज्ञान/Class_07_Matter_Atoms_Molecules.pptx
+++ b/Science_Complete_Course_SagarSir/02_Chemistry_रसायन_विज्ञान/Class_07_Matter_Atoms_Molecules.pptx
@@ -3553,7 +3553,7 @@
               </a:defRPr>
             </a:pPr>
             <a:r>
-              <a:t>मार्गदर्शक: सागर सर (NMMS King)  |  Helpline / WhatsApp: +91 91101 13671  |  Website: sagarcoaching.tech</a:t>
+              <a:t>मार्गदर्शक: सागर सर (NMMS King)  |  Website: sagarcoaching.tech</a:t>
             </a:r>
           </a:p>
         </p:txBody>
@@ -3725,7 +3725,7 @@
               </a:defRPr>
             </a:pPr>
             <a:r>
-              <a:t>WhatsApp / Helpline: +91 91101 13671  |  वेबसाइट: sagarcoaching.tech  |  Slide 10 of 37</a:t>
+              <a:t>वेबसाइट: sagarcoaching.tech  |  Slide 10 of 37</a:t>
             </a:r>
           </a:p>
         </p:txBody>
@@ -4243,7 +4243,7 @@
               </a:defRPr>
             </a:pPr>
             <a:r>
-              <a:t>WhatsApp / Helpline: +91 91101 13671  |  वेबसाइट: sagarcoaching.tech  |  Slide 11 of 37</a:t>
+              <a:t>वेबसाइट: sagarcoaching.tech  |  Slide 11 of 37</a:t>
             </a:r>
           </a:p>
         </p:txBody>
@@ -4690,7 +4690,7 @@
               </a:defRPr>
             </a:pPr>
             <a:r>
-              <a:t>WhatsApp / Helpline: +91 91101 13671  |  वेबसाइट: sagarcoaching.tech  |  Slide 12 of 37</a:t>
+              <a:t>वेबसाइट: sagarcoaching.tech  |  Slide 12 of 37</a:t>
             </a:r>
           </a:p>
         </p:txBody>
@@ -5208,7 +5208,7 @@
               </a:defRPr>
             </a:pPr>
             <a:r>
-              <a:t>WhatsApp / Helpline: +91 91101 13671  |  वेबसाइट: sagarcoaching.tech  |  Slide 13 of 37</a:t>
+              <a:t>वेबसाइट: sagarcoaching.tech  |  Slide 13 of 37</a:t>
             </a:r>
           </a:p>
         </p:txBody>
@@ -5655,7 +5655,7 @@
               </a:defRPr>
             </a:pPr>
             <a:r>
-              <a:t>WhatsApp / Helpline: +91 91101 13671  |  वेबसाइट: sagarcoaching.tech  |  Slide 14 of 37</a:t>
+              <a:t>वेबसाइट: sagarcoaching.tech  |  Slide 14 of 37</a:t>
             </a:r>
           </a:p>
         </p:txBody>
@@ -6173,7 +6173,7 @@
               </a:defRPr>
             </a:pPr>
             <a:r>
-              <a:t>WhatsApp / Helpline: +91 91101 13671  |  वेबसाइट: sagarcoaching.tech  |  Slide 15 of 37</a:t>
+              <a:t>वेबसाइट: sagarcoaching.tech  |  Slide 15 of 37</a:t>
             </a:r>
           </a:p>
         </p:txBody>
@@ -6620,7 +6620,7 @@
               </a:defRPr>
             </a:pPr>
             <a:r>
-              <a:t>WhatsApp / Helpline: +91 91101 13671  |  वेबसाइट: sagarcoaching.tech  |  Slide 16 of 37</a:t>
+              <a:t>वेबसाइट: sagarcoaching.tech  |  Slide 16 of 37</a:t>
             </a:r>
           </a:p>
         </p:txBody>
@@ -7138,7 +7138,7 @@
               </a:defRPr>
             </a:pPr>
             <a:r>
-              <a:t>WhatsApp / Helpline: +91 91101 13671  |  वेबसाइट: sagarcoaching.tech  |  Slide 17 of 37</a:t>
+              <a:t>वेबसाइट: sagarcoaching.tech  |  Slide 17 of 37</a:t>
             </a:r>
           </a:p>
         </p:txBody>
@@ -7585,7 +7585,7 @@
               </a:defRPr>
             </a:pPr>
             <a:r>
-              <a:t>WhatsApp / Helpline: +91 91101 13671  |  वेबसाइट: sagarcoaching.tech  |  Slide 18 of 37</a:t>
+              <a:t>वेबसाइट: sagarcoaching.tech  |  Slide 18 of 37</a:t>
             </a:r>
           </a:p>
         </p:txBody>
@@ -8103,7 +8103,7 @@
               </a:defRPr>
             </a:pPr>
             <a:r>
-              <a:t>WhatsApp / Helpline: +91 91101 13671  |  वेबसाइट: sagarcoaching.tech  |  Slide 19 of 37</a:t>
+              <a:t>वेबसाइट: sagarcoaching.tech  |  Slide 19 of 37</a:t>
             </a:r>
           </a:p>
         </p:txBody>
@@ -8550,7 +8550,7 @@
               </a:defRPr>
             </a:pPr>
             <a:r>
-              <a:t>WhatsApp / Helpline: +91 91101 13671  |  वेबसाइट: sagarcoaching.tech  |  Slide 2 of 37</a:t>
+              <a:t>वेबसाइट: sagarcoaching.tech  |  Slide 2 of 37</a:t>
             </a:r>
           </a:p>
         </p:txBody>
@@ -8967,7 +8967,7 @@
               </a:defRPr>
             </a:pPr>
             <a:r>
-              <a:t>WhatsApp / Helpline: +91 91101 13671  |  वेबसाइट: sagarcoaching.tech  |  Slide 20 of 37</a:t>
+              <a:t>वेबसाइट: sagarcoaching.tech  |  Slide 20 of 37</a:t>
             </a:r>
           </a:p>
         </p:txBody>
@@ -9485,7 +9485,7 @@
               </a:defRPr>
             </a:pPr>
             <a:r>
-              <a:t>WhatsApp / Helpline: +91 91101 13671  |  वेबसाइट: sagarcoaching.tech  |  Slide 21 of 37</a:t>
+              <a:t>वेबसाइट: sagarcoaching.tech  |  Slide 21 of 37</a:t>
             </a:r>
           </a:p>
         </p:txBody>
@@ -9932,7 +9932,7 @@
               </a:defRPr>
             </a:pPr>
             <a:r>
-              <a:t>WhatsApp / Helpline: +91 91101 13671  |  वेबसाइट: sagarcoaching.tech  |  Slide 22 of 37</a:t>
+              <a:t>वेबसाइट: sagarcoaching.tech  |  Slide 22 of 37</a:t>
             </a:r>
           </a:p>
         </p:txBody>
@@ -10450,7 +10450,7 @@
               </a:defRPr>
             </a:pPr>
             <a:r>
-              <a:t>WhatsApp / Helpline: +91 91101 13671  |  वेबसाइट: sagarcoaching.tech  |  Slide 23 of 37</a:t>
+              <a:t>वेबसाइट: sagarcoaching.tech  |  Slide 23 of 37</a:t>
             </a:r>
           </a:p>
         </p:txBody>
@@ -10897,7 +10897,7 @@
               </a:defRPr>
             </a:pPr>
             <a:r>
-              <a:t>WhatsApp / Helpline: +91 91101 13671  |  वेबसाइट: sagarcoaching.tech  |  Slide 24 of 37</a:t>
+              <a:t>वेबसाइट: sagarcoaching.tech  |  Slide 24 of 37</a:t>
             </a:r>
           </a:p>
         </p:txBody>
@@ -11415,7 +11415,7 @@
               </a:defRPr>
             </a:pPr>
             <a:r>
-              <a:t>WhatsApp / Helpline: +91 91101 13671  |  वेबसाइट: sagarcoaching.tech  |  Slide 25 of 37</a:t>
+              <a:t>वेबसाइट: sagarcoaching.tech  |  Slide 25 of 37</a:t>
             </a:r>
           </a:p>
         </p:txBody>
@@ -11862,7 +11862,7 @@
               </a:defRPr>
             </a:pPr>
             <a:r>
-              <a:t>WhatsApp / Helpline: +91 91101 13671  |  वेबसाइट: sagarcoaching.tech  |  Slide 26 of 37</a:t>
+              <a:t>वेबसाइट: sagarcoaching.tech  |  Slide 26 of 37</a:t>
             </a:r>
           </a:p>
         </p:txBody>
@@ -12380,7 +12380,7 @@
               </a:defRPr>
             </a:pPr>
             <a:r>
-              <a:t>WhatsApp / Helpline: +91 91101 13671  |  वेबसाइट: sagarcoaching.tech  |  Slide 27 of 37</a:t>
+              <a:t>वेबसाइट: sagarcoaching.tech  |  Slide 27 of 37</a:t>
             </a:r>
           </a:p>
         </p:txBody>
@@ -12827,7 +12827,7 @@
               </a:defRPr>
             </a:pPr>
             <a:r>
-              <a:t>WhatsApp / Helpline: +91 91101 13671  |  वेबसाइट: sagarcoaching.tech  |  Slide 28 of 37</a:t>
+              <a:t>वेबसाइट: sagarcoaching.tech  |  Slide 28 of 37</a:t>
             </a:r>
           </a:p>
         </p:txBody>
@@ -13345,7 +13345,7 @@
               </a:defRPr>
             </a:pPr>
             <a:r>
-              <a:t>WhatsApp / Helpline: +91 91101 13671  |  वेबसाइट: sagarcoaching.tech  |  Slide 29 of 37</a:t>
+              <a:t>वेबसाइट: sagarcoaching.tech  |  Slide 29 of 37</a:t>
             </a:r>
           </a:p>
         </p:txBody>
@@ -13792,7 +13792,7 @@
               </a:defRPr>
             </a:pPr>
             <a:r>
-              <a:t>WhatsApp / Helpline: +91 91101 13671  |  वेबसाइट: sagarcoaching.tech  |  Slide 3 of 37</a:t>
+              <a:t>वेबसाइट: sagarcoaching.tech  |  Slide 3 of 37</a:t>
             </a:r>
           </a:p>
         </p:txBody>
@@ -14171,7 +14171,7 @@
               </a:defRPr>
             </a:pPr>
             <a:r>
-              <a:t>WhatsApp / Helpline: +91 91101 13671  |  वेबसाइट: sagarcoaching.tech  |  Slide 30 of 37</a:t>
+              <a:t>वेबसाइट: sagarcoaching.tech  |  Slide 30 of 37</a:t>
             </a:r>
           </a:p>
         </p:txBody>
@@ -14689,7 +14689,7 @@
               </a:defRPr>
             </a:pPr>
             <a:r>
-              <a:t>WhatsApp / Helpline: +91 91101 13671  |  वेबसाइट: sagarcoaching.tech  |  Slide 31 of 37</a:t>
+              <a:t>वेबसाइट: sagarcoaching.tech  |  Slide 31 of 37</a:t>
             </a:r>
           </a:p>
         </p:txBody>
@@ -15136,7 +15136,7 @@
               </a:defRPr>
             </a:pPr>
             <a:r>
-              <a:t>WhatsApp / Helpline: +91 91101 13671  |  वेबसाइट: sagarcoaching.tech  |  Slide 32 of 37</a:t>
+              <a:t>वेबसाइट: sagarcoaching.tech  |  Slide 32 of 37</a:t>
             </a:r>
           </a:p>
         </p:txBody>
@@ -15654,7 +15654,7 @@
               </a:defRPr>
             </a:pPr>
             <a:r>
-              <a:t>WhatsApp / Helpline: +91 91101 13671  |  वेबसाइट: sagarcoaching.tech  |  Slide 33 of 37</a:t>
+              <a:t>वेबसाइट: sagarcoaching.tech  |  Slide 33 of 37</a:t>
             </a:r>
           </a:p>
         </p:txBody>
@@ -16101,7 +16101,7 @@
               </a:defRPr>
             </a:pPr>
             <a:r>
-              <a:t>WhatsApp / Helpline: +91 91101 13671  |  वेबसाइट: sagarcoaching.tech  |  Slide 34 of 37</a:t>
+              <a:t>वेबसाइट: sagarcoaching.tech  |  Slide 34 of 37</a:t>
             </a:r>
           </a:p>
         </p:txBody>
@@ -16619,7 +16619,7 @@
               </a:defRPr>
             </a:pPr>
             <a:r>
-              <a:t>WhatsApp / Helpline: +91 91101 13671  |  वेबसाइट: sagarcoaching.tech  |  Slide 35 of 37</a:t>
+              <a:t>वेबसाइट: sagarcoaching.tech  |  Slide 35 of 37</a:t>
             </a:r>
           </a:p>
         </p:txBody>
@@ -16960,7 +16960,7 @@
               </a:defRPr>
             </a:pPr>
             <a:r>
-              <a:t>WhatsApp / Helpline: +91 91101 13671  |  वेबसाइट: sagarcoaching.tech  |  Slide 36 of 37</a:t>
+              <a:t>वेबसाइट: sagarcoaching.tech  |  Slide 36 of 37</a:t>
             </a:r>
           </a:p>
         </p:txBody>
@@ -17353,7 +17353,7 @@
               </a:defRPr>
             </a:pPr>
             <a:r>
-              <a:t>इस क्लास की PDF डाउनलोड करें: sagarcoaching.tech | Helpline: +91 91101 13671</a:t>
+              <a:t>इस क्लास की PDF डाउनलोड करें: sagarcoaching.tech</a:t>
             </a:r>
           </a:p>
         </p:txBody>
@@ -17508,7 +17508,7 @@
               </a:defRPr>
             </a:pPr>
             <a:r>
-              <a:t>मार्गदर्शक: सागर सर (NMMS King)  |  Helpline / WhatsApp: +91 91101 13671  |  Website: sagarcoaching.tech</a:t>
+              <a:t>मार्गदर्शक: सागर सर (NMMS King)  |  Website: sagarcoaching.tech</a:t>
             </a:r>
           </a:p>
         </p:txBody>
@@ -17680,7 +17680,7 @@
               </a:defRPr>
             </a:pPr>
             <a:r>
-              <a:t>WhatsApp / Helpline: +91 91101 13671  |  वेबसाइट: sagarcoaching.tech  |  Slide 4 of 37</a:t>
+              <a:t>वेबसाइट: sagarcoaching.tech  |  Slide 4 of 37</a:t>
             </a:r>
           </a:p>
         </p:txBody>
@@ -18059,7 +18059,7 @@
               </a:defRPr>
             </a:pPr>
             <a:r>
-              <a:t>WhatsApp / Helpline: +91 91101 13671  |  वेबसाइट: sagarcoaching.tech  |  Slide 5 of 37</a:t>
+              <a:t>वेबसाइट: sagarcoaching.tech  |  Slide 5 of 37</a:t>
             </a:r>
           </a:p>
         </p:txBody>
@@ -18506,7 +18506,7 @@
               </a:defRPr>
             </a:pPr>
             <a:r>
-              <a:t>WhatsApp / Helpline: +91 91101 13671  |  वेबसाइट: sagarcoaching.tech  |  Slide 6 of 37</a:t>
+              <a:t>वेबसाइट: sagarcoaching.tech  |  Slide 6 of 37</a:t>
             </a:r>
           </a:p>
         </p:txBody>
@@ -19024,7 +19024,7 @@
               </a:defRPr>
             </a:pPr>
             <a:r>
-              <a:t>WhatsApp / Helpline: +91 91101 13671  |  वेबसाइट: sagarcoaching.tech  |  Slide 7 of 37</a:t>
+              <a:t>वेबसाइट: sagarcoaching.tech  |  Slide 7 of 37</a:t>
             </a:r>
           </a:p>
         </p:txBody>
@@ -19471,7 +19471,7 @@
               </a:defRPr>
             </a:pPr>
             <a:r>
-              <a:t>WhatsApp / Helpline: +91 91101 13671  |  वेबसाइट: sagarcoaching.tech  |  Slide 8 of 37</a:t>
+              <a:t>वेबसाइट: sagarcoaching.tech  |  Slide 8 of 37</a:t>
             </a:r>
           </a:p>
         </p:txBody>
@@ -19989,7 +19989,7 @@
               </a:defRPr>
             </a:pPr>
             <a:r>
-              <a:t>WhatsApp / Helpline: +91 91101 13671  |  वेबसाइट: sagarcoaching.tech  |  Slide 9 of 37</a:t>
+              <a:t>वेबसाइट: sagarcoaching.tech  |  Slide 9 of 37</a:t>
             </a:r>
           </a:p>
         </p:txBody>
